--- a/level3/slides/Level3_Lesson6_Slides.pptx
+++ b/level3/slides/Level3_Lesson6_Slides.pptx
@@ -912,7 +912,7 @@
           </a:p>
           <a:p>
             <a:r>
-              <a:t>Audio: the listening audio for this lesson (about 1:20) is coming soon. It will use computer-generated voices (Chatterbox TTS cloned from synthetic Kokoro-82M reference clips); no recordings of real people. Until it is ready, read the listening script (in the notes of the Before You Listen slide) with a volunteer. The names and the story are invented.</a:t>
+              <a:t>Audio: synthetic voices, computer-generated (Chatterbox TTS cloned from Kokoro-82M reference clips). No recordings of real people. The names and the story are invented.</a:t>
             </a:r>
           </a:p>
           <a:p>
@@ -1287,7 +1287,7 @@
           </a:p>
           <a:p>
             <a:r>
-              <a:t>The audio (about 1:20) is coming soon. When it is ready, it plays once; press play again for play 2. Until then, read the listening script (at the end of these notes) with a volunteer.</a:t>
+              <a:t>The audio (L3_L6_listening.mp3, about 1:16) plays once. Press play again for play 2. A third play is fine if the class needs it.</a:t>
             </a:r>
           </a:p>
           <a:p>
@@ -1297,7 +1297,7 @@
           </a:p>
           <a:p>
             <a:r>
-              <a:t>Audio: the listening audio for this lesson (about 1:20) is coming soon. It will use computer-generated voices (Chatterbox TTS cloned from synthetic Kokoro-82M reference clips); no recordings of real people. Until it is ready, read the listening script (in the notes of the Before You Listen slide) with a volunteer. The names and the story are invented.</a:t>
+              <a:t>Audio: synthetic voices, computer-generated (Chatterbox TTS cloned from Kokoro-82M reference clips). No recordings of real people. The names and the story are invented.</a:t>
             </a:r>
           </a:p>
           <a:p>
@@ -1308,76 +1308,6 @@
           <a:p>
             <a:r>
               <a:t>Picture: Twemoji graphics by Twitter, Inc. and other contributors (https://github.com/jdecked/twemoji), CC BY 4.0 (https://creativecommons.org/licenses/by/4.0/); resized and combined, with speech bubbles, signs, and labels (images/CREDITS.md).</a:t>
-            </a:r>
-          </a:p>
-          <a:p>
-            <a:r>
-              <a:t>Listening script (the audio is coming soon; until then, read it aloud with a volunteer at a normal, friendly speed):</a:t>
-            </a:r>
-          </a:p>
-          <a:p>
-            <a:r>
-              <a:t>Narrator: Lesson six. Listening. First, listen to a weather alert on the radio. Then listen to two roommates, Nadia and Ben.</a:t>
-            </a:r>
-          </a:p>
-          <a:p>
-            <a:r>
-              <a:t>Narrator: This is a weather alert for Green County. A big storm will arrive tonight at about nine o'clock. There will probably be strong wind and heavy rain. The power will probably go out in some areas.</a:t>
-            </a:r>
-          </a:p>
-          <a:p>
-            <a:r>
-              <a:t>Nadia: Ben, did you hear that? A storm is coming tonight.</a:t>
-            </a:r>
-          </a:p>
-          <a:p>
-            <a:r>
-              <a:t>Ben: Yes. If the power goes out, we won't have any lights.</a:t>
-            </a:r>
-          </a:p>
-          <a:p>
-            <a:r>
-              <a:t>Nadia: Do we have a flashlight?</a:t>
-            </a:r>
-          </a:p>
-          <a:p>
-            <a:r>
-              <a:t>Ben: We have one, but it doesn't have batteries. I'll buy some after work.</a:t>
-            </a:r>
-          </a:p>
-          <a:p>
-            <a:r>
-              <a:t>Nadia: Good. And if the power goes out, the fridge won't work.</a:t>
-            </a:r>
-          </a:p>
-          <a:p>
-            <a:r>
-              <a:t>Ben: Then we'll eat the food in the fridge first! I'll buy bottled water, too.</a:t>
-            </a:r>
-          </a:p>
-          <a:p>
-            <a:r>
-              <a:t>Nadia: Great. Should we buy candles?</a:t>
-            </a:r>
-          </a:p>
-          <a:p>
-            <a:r>
-              <a:t>Ben: No, candles aren't safe. We'll use the flashlight. And I'll charge our phones before nine.</a:t>
-            </a:r>
-          </a:p>
-          <a:p>
-            <a:r>
-              <a:t>Nadia: OK. If the storm is really bad, will we go to work tomorrow?</a:t>
-            </a:r>
-          </a:p>
-          <a:p>
-            <a:r>
-              <a:t>Ben: Probably not. It'll probably rain all night. I'll check the forecast in the morning.</a:t>
-            </a:r>
-          </a:p>
-          <a:p>
-            <a:r>
-              <a:t>Narrator: That's the end of the listening.</a:t>
             </a:r>
           </a:p>
         </p:txBody>
@@ -12539,7 +12469,7 @@
                 <a:ea typeface="Lexend Deca" pitchFamily="34" charset="-122"/>
                 <a:cs typeface="Lexend Deca" pitchFamily="34" charset="-120"/>
               </a:rPr>
-              <a:t>Audio: about 1:20. It plays once.</a:t>
+              <a:t>Audio: about 1:16. It plays once.</a:t>
             </a:r>
             <a:endParaRPr lang="en-US" sz="2200" dirty="0"/>
           </a:p>
@@ -32886,7 +32816,7 @@
                 <a:ea typeface="Lexend Deca" pitchFamily="34" charset="-122"/>
                 <a:cs typeface="Lexend Deca" pitchFamily="34" charset="-120"/>
               </a:rPr>
-              <a:t>Audio (coming soon): synthetic voices made with Chatterbox TTS (MIT License), cloned from short synthetic reference clips made with Kokoro-82M (Apache License 2.0). No recordings of real people. Each file will carry an inaudible Perth watermark marking it as AI-generated. Font: Lexend Deca (OFL 1.1).</a:t>
+              <a:t>Audio: synthetic voices made with Chatterbox TTS (MIT License), cloned from short synthetic reference clips made with Kokoro-82M (Apache License 2.0). No recordings of real people were used. Each file carries an inaudible Perth watermark marking it as AI-generated. Font: Lexend Deca (OFL 1.1).</a:t>
             </a:r>
             <a:endParaRPr lang="en-US" sz="1350" dirty="0" b="0"/>
           </a:p>
